--- a/scorecard-General/PAGINA-2BI/academia/materiales/05_Estandar_Presentacion_Comercial.pptx
+++ b/scorecard-General/PAGINA-2BI/academia/materiales/05_Estandar_Presentacion_Comercial.pptx
@@ -3161,7 +3161,7 @@
                 <a:ea typeface="Calibri" pitchFamily="34" charset="-122"/>
                 <a:cs typeface="Calibri" pitchFamily="34" charset="-120"/>
               </a:rPr>
-              <a:t>Bono 2 — Workshop n8n + AI</a:t>
+              <a:t>Bono 2 — Workshop DAX Patterns Avanzados</a:t>
             </a:r>
             <a:endParaRPr lang="en-US" sz="1400" dirty="0"/>
           </a:p>
@@ -3200,7 +3200,7 @@
                 <a:ea typeface="Calibri" pitchFamily="34" charset="-122"/>
                 <a:cs typeface="Calibri" pitchFamily="34" charset="-120"/>
               </a:rPr>
-              <a:t>Construye un agente que envía reportes diarios al WhatsApp del CEO.</a:t>
+              <a:t>Patterns reusables: cohort analysis, ABC, RFM, churn — listos para copy/paste.</a:t>
             </a:r>
             <a:endParaRPr lang="en-US" sz="1100" dirty="0"/>
           </a:p>
@@ -6426,7 +6426,7 @@
                 <a:ea typeface="Calibri" pitchFamily="34" charset="-122"/>
                 <a:cs typeface="Calibri" pitchFamily="34" charset="-120"/>
               </a:rPr>
-              <a:t>✗  Buscas Fabric, Python, AI agents (Premium).</a:t>
+              <a:t>✗  Buscas Power BI Premium, Python, AI agents (Premium).</a:t>
             </a:r>
             <a:endParaRPr lang="en-US" sz="1200" dirty="0"/>
           </a:p>
@@ -11618,7 +11618,7 @@
                 <a:ea typeface="Calibri" pitchFamily="34" charset="-122"/>
                 <a:cs typeface="Calibri" pitchFamily="34" charset="-120"/>
               </a:rPr>
-              <a:t>★  Microsoft Fabric, Direct Lake y Semantic Link.</a:t>
+              <a:t>★  Power BI Premium, Premium Capacity y Semantic Link.</a:t>
             </a:r>
             <a:endParaRPr lang="en-US" sz="1300" dirty="0"/>
           </a:p>
@@ -11657,7 +11657,7 @@
                 <a:ea typeface="Calibri" pitchFamily="34" charset="-122"/>
                 <a:cs typeface="Calibri" pitchFamily="34" charset="-120"/>
               </a:rPr>
-              <a:t>★  Python (sempy, pandas, scikit-learn) y AI agents.</a:t>
+              <a:t>★  Python (DAX Studio, pandas, Tabular Editor) y AI agents.</a:t>
             </a:r>
             <a:endParaRPr lang="en-US" sz="1300" dirty="0"/>
           </a:p>
@@ -11696,7 +11696,7 @@
                 <a:ea typeface="Calibri" pitchFamily="34" charset="-122"/>
                 <a:cs typeface="Calibri" pitchFamily="34" charset="-120"/>
               </a:rPr>
-              <a:t>★  n8n, Anthropic Claude, orquestación de agentes.</a:t>
+              <a:t>★  Power BI Subscriptions, Smart Narrative, orquestación de agentes.</a:t>
             </a:r>
             <a:endParaRPr lang="en-US" sz="1300" dirty="0"/>
           </a:p>
@@ -13012,7 +13012,7 @@
                 <a:ea typeface="Calibri" pitchFamily="34" charset="-122"/>
                 <a:cs typeface="Calibri" pitchFamily="34" charset="-120"/>
               </a:rPr>
-              <a:t>Fabric + Copilot + Automatización + Portafolio</a:t>
+              <a:t>Power BI Service Avanzado + Portafolio + Cierre</a:t>
             </a:r>
             <a:endParaRPr lang="en-US" sz="1100" dirty="0"/>
           </a:p>
@@ -14130,7 +14130,7 @@
                 <a:ea typeface="Calibri" pitchFamily="34" charset="-122"/>
                 <a:cs typeface="Calibri" pitchFamily="34" charset="-120"/>
               </a:rPr>
-              <a:t>Direct Lake (Fabric)</a:t>
+              <a:t>Premium Capacity (Power BI Premium)</a:t>
             </a:r>
             <a:endParaRPr lang="en-US" sz="1300" dirty="0"/>
           </a:p>
